--- a/Apresentacao_Executiva_TechChallenge_Fase3_-_Grupo106.pptx
+++ b/Apresentacao_Executiva_TechChallenge_Fase3_-_Grupo106.pptx
@@ -143,7 +143,7 @@
           <a:lstStyle/>
           <a:p>
             <a:r>
-              <a:rPr sz="1200" b="0">
+              <a:rPr lang="pt-BR" sz="1200" b="0">
                 <a:solidFill>
                   <a:srgbClr val="16233A"/>
                 </a:solidFill>
@@ -944,9 +944,7 @@
           <a:bodyPr/>
           <a:lstStyle/>
           <a:p>
-            <a:r>
-              <a:t>(≈15s) Olá a todos. Somos o Grupo 106 e hoje vamos mostrar como transformamos os dados públicos do Indicador Criança Alfabetizada em uma ferramenta prática para priorizar ações de alfabetização nos municípios brasileiros.</a:t>
-            </a:r>
+            <a:endParaRPr dirty="0"/>
           </a:p>
         </p:txBody>
       </p:sp>
@@ -1030,10 +1028,7 @@
           <a:bodyPr/>
           <a:lstStyle/>
           <a:p>
-            <a:r>
-              <a:rPr lang="en-US" dirty="0"/>
-              <a:t>(≈15s) Em resumo: com dados públicos e um modelo simples, estável e explicável, conseguimos apontar onde agir primeiro para garantir que mais crianças sejam alfabetizadas na idade certa. Obrigado!</a:t>
-            </a:r>
+            <a:endParaRPr dirty="0"/>
           </a:p>
         </p:txBody>
       </p:sp>
@@ -1117,9 +1112,7 @@
           <a:bodyPr/>
           <a:lstStyle/>
           <a:p>
-            <a:r>
-              <a:t>(≈30s) Alfabetizar até o fim do 2º ano é a base de toda a trajetória escolar. Na camada Gold que construímos na Fase 2, 5.232 municípios têm meta definida — e 2.444 deles, 46,7%, não atingiram a meta. Quase metade. Olhar o resultado depois que ele acontece não basta: o gestor precisa saber onde está o risco para agir a tempo.</a:t>
-            </a:r>
+            <a:endParaRPr dirty="0"/>
           </a:p>
         </p:txBody>
       </p:sp>
@@ -1221,9 +1214,7 @@
           <a:bodyPr/>
           <a:lstStyle/>
           <a:p>
-            <a:r>
-              <a:t>(≈30s) A exploração dos dados já mostrou um sinal forte: quem atingiu a meta tem resultado médio de 73,4, contra 51,7 de quem não atingiu — quase 22 pontos de diferença. No gráfico, as duas variáveis mais correlacionadas, o gap até a meta e o próprio resultado, são derivadas do alvo e por isso ficaram fora do modelo. Entre as variáveis válidas, lideram a taxa de alfabetização e a média em Português, seguidas pela distribuição dos alunos por níveis de proficiência.</a:t>
-            </a:r>
+            <a:endParaRPr dirty="0"/>
           </a:p>
         </p:txBody>
       </p:sp>
@@ -1313,10 +1304,7 @@
           <a:bodyPr/>
           <a:lstStyle/>
           <a:p>
-            <a:r>
-              <a:rPr lang="en-US" dirty="0"/>
-              <a:t>(≈30s) Antes de treinar, garantimos que o modelo não “colasse” a resposta. Removemos tudo o que é derivado do próprio resultado: o gap até a meta, que tinha a maior correlação, o resultado e a meta do mesmo período, a classificação de risco, além de identificadores e metadados. Ficaram 12 preditores. Separamos 80% para treino e 20% para teste, de forma estratificada, e todo o pré-processamento é ajustado apenas no treino, dentro do pipeline do Scikit-learn.</a:t>
-            </a:r>
+            <a:endParaRPr dirty="0"/>
           </a:p>
         </p:txBody>
       </p:sp>
@@ -1388,17 +1376,7 @@
           <a:bodyPr/>
           <a:lstStyle/>
           <a:p>
-            <a:r>
-              <a:t>(≈30s) Aqui abrimos o resultado no conjunto de teste: 1.047 municípios que o modelo nunca viu. No total, ele acertou 81%. Os quadros verdes são os acertos; o vermelho forte é o erro que mais nos preocupa: 106 municípios em risco que não foram sinalizados — por isso o ranking apoia, mas não substitui, o olhar técnico das secretarias. Os 93 alarmes falsos custam menos: no pior caso, uma visita a mais. As curvas confirmam: ROC-AUC de 0,90 — em 9 de cada 10 comparações o modelo aponta o município de maior risco — e precisão média de 0,92, contra 0,53 de um sorteio.</a:t>
-            </a:r>
-          </a:p>
-          <a:p>
-            <a:endParaRPr/>
-          </a:p>
-          <a:p>
-            <a:r>
-              <a:t>[Se perguntarem] A curva de precisão × cobertura foi calculada para a classe 'atingiu a meta' (padrão do scikit-learn). 0,53 é a proporção de municípios que atingiram a meta no teste (558 de 1.047), que é a precisão de um classificador aleatório.</a:t>
-            </a:r>
+            <a:endParaRPr dirty="0"/>
           </a:p>
         </p:txBody>
       </p:sp>
@@ -1442,9 +1420,7 @@
           <a:bodyPr/>
           <a:lstStyle/>
           <a:p>
-            <a:r>
-              <a:t>(≈25s) E o que mais pesa na previsão? Pela importância por permutação, a taxa de alfabetização atual do município é o fator dominante, com impacto cerca de três vezes maior que o segundo: a taxa usada como base da meta — o ponto de partida define o tamanho do desafio. Os níveis de proficiência acrescentam pouco à previsão, mas seguem úteis para o diagnóstico pedagógico.</a:t>
-            </a:r>
+            <a:endParaRPr dirty="0"/>
           </a:p>
         </p:txBody>
       </p:sp>
@@ -1500,10 +1476,7 @@
           <a:bodyPr/>
           <a:lstStyle/>
           <a:p>
-            <a:r>
-              <a:rPr lang="en-US" dirty="0"/>
-              <a:t>(≈30s) Tudo isso vira uma fila de priorização. Aqui estão os dez municípios com maior probabilidade de não atingir a meta na base de teste de 2024. Um padrão chama atenção: 11 dos 20 municípios de maior risco estão no Rio Grande do Sul, seguidos por Maranhão e Bahia. Esse é o tipo de achado que deve acionar uma investigação conjunta com as secretarias estaduais.</a:t>
-            </a:r>
+            <a:endParaRPr dirty="0"/>
           </a:p>
         </p:txBody>
       </p:sp>
@@ -1575,9 +1548,7 @@
           <a:bodyPr/>
           <a:lstStyle/>
           <a:p>
-            <a:r>
-              <a:t>(≈25s) Em termos práticos, o que a solução entrega hoje ao gestor? Uma classificação de quais municípios tendem a atingir a meta, uma probabilidade de risco para cada um, um ranking de prioridades, a explicação dos fatores que mais pesam, a leitura territorial por estado e o agrupamento dos municípios em quatro perfis semelhantes — tudo a partir dos dados públicos integrados na camada Gold.</a:t>
-            </a:r>
+            <a:endParaRPr dirty="0"/>
           </a:p>
         </p:txBody>
       </p:sp>
@@ -1633,10 +1604,7 @@
           <a:bodyPr/>
           <a:lstStyle/>
           <a:p>
-            <a:r>
-              <a:rPr lang="en-US" dirty="0"/>
-              <a:t>(≈30s) Como isso apoia políticas públicas? Primeiro, priorizando recursos, formação docente e acompanhamento pedagógico onde o risco é maior. Segundo, funcionando como alerta precoce, antes da próxima avaliação. Terceiro, ajudando a monitorar e calibrar metas, já que pontos de partida diferentes significam desafios diferentes. E, por fim, permitindo uma coordenação regional nos estados onde o risco se concentra.</a:t>
-            </a:r>
+            <a:endParaRPr dirty="0"/>
           </a:p>
         </p:txBody>
       </p:sp>
@@ -2488,45 +2456,6 @@
       </p:grpSpPr>
       <p:sp>
         <p:nvSpPr>
-          <p:cNvPr id="2" name="Text 0"/>
-          <p:cNvSpPr txBox="1"/>
-          <p:nvPr/>
-        </p:nvSpPr>
-        <p:spPr>
-          <a:xfrm>
-            <a:off x="548640" y="548640"/>
-            <a:ext cx="5486400" cy="274320"/>
-          </a:xfrm>
-          <a:prstGeom prst="rect">
-            <a:avLst/>
-          </a:prstGeom>
-          <a:noFill/>
-          <a:ln/>
-        </p:spPr>
-        <p:txBody>
-          <a:bodyPr wrap="square" lIns="0" tIns="0" rIns="0" bIns="0" rtlCol="0" anchor="ctr"/>
-          <a:lstStyle/>
-          <a:p>
-            <a:pPr marL="0" indent="0">
-              <a:buNone/>
-            </a:pPr>
-            <a:r>
-              <a:rPr lang="en-US" sz="1100" b="1" kern="0" spc="200" dirty="0">
-                <a:solidFill>
-                  <a:srgbClr val="F4B400"/>
-                </a:solidFill>
-                <a:latin typeface="Calibri" pitchFamily="34" charset="0"/>
-                <a:ea typeface="Calibri" pitchFamily="34" charset="-122"/>
-                <a:cs typeface="Calibri" pitchFamily="34" charset="-120"/>
-              </a:rPr>
-              <a:t>MENSAGEM FINAL</a:t>
-            </a:r>
-            <a:endParaRPr lang="en-US" sz="1100" dirty="0"/>
-          </a:p>
-        </p:txBody>
-      </p:sp>
-      <p:sp>
-        <p:nvSpPr>
           <p:cNvPr id="3" name="Text 1"/>
           <p:cNvSpPr txBox="1"/>
           <p:nvPr/>
@@ -2845,6 +2774,53 @@
               </a:rPr>
               <a:t>Grupo 106  ·  Tech Challenge Fase 3  ·  FIAP Pós Tech AI Scientist</a:t>
             </a:r>
+          </a:p>
+        </p:txBody>
+      </p:sp>
+      <p:sp>
+        <p:nvSpPr>
+          <p:cNvPr id="5" name="Text 0">
+            <a:extLst>
+              <a:ext uri="{FF2B5EF4-FFF2-40B4-BE49-F238E27FC236}">
+                <a16:creationId xmlns:a16="http://schemas.microsoft.com/office/drawing/2014/main" id="{187D2DB0-FC7D-7045-D1EC-60B4712843B6}"/>
+              </a:ext>
+            </a:extLst>
+          </p:cNvPr>
+          <p:cNvSpPr txBox="1"/>
+          <p:nvPr/>
+        </p:nvSpPr>
+        <p:spPr>
+          <a:xfrm>
+            <a:off x="548640" y="541401"/>
+            <a:ext cx="5486400" cy="274320"/>
+          </a:xfrm>
+          <a:prstGeom prst="rect">
+            <a:avLst/>
+          </a:prstGeom>
+          <a:noFill/>
+          <a:ln/>
+        </p:spPr>
+        <p:txBody>
+          <a:bodyPr wrap="square" lIns="0" tIns="0" rIns="0" bIns="0" rtlCol="0" anchor="ctr"/>
+          <a:lstStyle/>
+          <a:p>
+            <a:r>
+              <a:rPr lang="pt-BR" sz="1400" b="1" kern="0" spc="200" dirty="0">
+                <a:solidFill>
+                  <a:srgbClr val="F4B400"/>
+                </a:solidFill>
+                <a:latin typeface="Calibri" pitchFamily="34" charset="0"/>
+                <a:cs typeface="Calibri" pitchFamily="34" charset="-120"/>
+              </a:rPr>
+              <a:t>Inteligência para orientar decisões públicas</a:t>
+            </a:r>
+            <a:endParaRPr lang="en-US" sz="1400" b="1" kern="0" spc="200" dirty="0">
+              <a:solidFill>
+                <a:srgbClr val="F4B400"/>
+              </a:solidFill>
+              <a:latin typeface="Calibri" pitchFamily="34" charset="0"/>
+              <a:cs typeface="Calibri" pitchFamily="34" charset="-120"/>
+            </a:endParaRPr>
           </a:p>
         </p:txBody>
       </p:sp>
@@ -16206,7 +16182,7 @@
                 <a:ea typeface="Calibri" pitchFamily="34" charset="-122"/>
                 <a:cs typeface="Calibri" pitchFamily="34" charset="-120"/>
               </a:rPr>
-              <a:t>Usar a probabilidade como sinal de alerta antes da próxima avaliação, e não só para explicar o passado.</a:t>
+              <a:t>Usar a probabilidade como sinal de priorização; com mais histórico, evoluir para alerta antecipado.</a:t>
             </a:r>
             <a:endParaRPr lang="en-US" sz="1200" dirty="0"/>
           </a:p>
